--- a/presentaciion FLP.pptx
+++ b/presentaciion FLP.pptx
@@ -291,7 +291,7 @@
             <a:fld id="{57E0CF6C-748E-4B7A-BC8B-3011EF78ED13}" type="datetime1">
               <a:rPr lang="en-US" smtClean="0"/>
               <a:pPr/>
-              <a:t>11/16/2022</a:t>
+              <a:t>11/20/2022</a:t>
             </a:fld>
             <a:endParaRPr lang="en-US" dirty="0"/>
           </a:p>
@@ -567,7 +567,7 @@
             <a:fld id="{57E0CF6C-748E-4B7A-BC8B-3011EF78ED13}" type="datetime1">
               <a:rPr lang="en-US" smtClean="0"/>
               <a:pPr/>
-              <a:t>11/16/2022</a:t>
+              <a:t>11/20/2022</a:t>
             </a:fld>
             <a:endParaRPr lang="en-US" dirty="0"/>
           </a:p>
@@ -807,7 +807,7 @@
             <a:fld id="{57E0CF6C-748E-4B7A-BC8B-3011EF78ED13}" type="datetime1">
               <a:rPr lang="en-US" smtClean="0"/>
               <a:pPr/>
-              <a:t>11/16/2022</a:t>
+              <a:t>11/20/2022</a:t>
             </a:fld>
             <a:endParaRPr lang="en-US" dirty="0"/>
           </a:p>
@@ -1126,7 +1126,7 @@
             <a:fld id="{57E0CF6C-748E-4B7A-BC8B-3011EF78ED13}" type="datetime1">
               <a:rPr lang="en-US" smtClean="0"/>
               <a:pPr/>
-              <a:t>11/16/2022</a:t>
+              <a:t>11/20/2022</a:t>
             </a:fld>
             <a:endParaRPr lang="en-US" dirty="0"/>
           </a:p>
@@ -1608,7 +1608,7 @@
             <a:fld id="{57E0CF6C-748E-4B7A-BC8B-3011EF78ED13}" type="datetime1">
               <a:rPr lang="en-US" smtClean="0"/>
               <a:pPr/>
-              <a:t>11/16/2022</a:t>
+              <a:t>11/20/2022</a:t>
             </a:fld>
             <a:endParaRPr lang="en-US" dirty="0"/>
           </a:p>
@@ -2164,7 +2164,7 @@
             <a:fld id="{57E0CF6C-748E-4B7A-BC8B-3011EF78ED13}" type="datetime1">
               <a:rPr lang="en-US" smtClean="0"/>
               <a:pPr/>
-              <a:t>11/16/2022</a:t>
+              <a:t>11/20/2022</a:t>
             </a:fld>
             <a:endParaRPr lang="en-US" dirty="0"/>
           </a:p>
@@ -2947,7 +2947,7 @@
             <a:fld id="{57E0CF6C-748E-4B7A-BC8B-3011EF78ED13}" type="datetime1">
               <a:rPr lang="en-US" smtClean="0"/>
               <a:pPr/>
-              <a:t>11/16/2022</a:t>
+              <a:t>11/20/2022</a:t>
             </a:fld>
             <a:endParaRPr lang="en-US" dirty="0"/>
           </a:p>
@@ -3131,7 +3131,7 @@
             <a:fld id="{57E0CF6C-748E-4B7A-BC8B-3011EF78ED13}" type="datetime1">
               <a:rPr lang="en-US" smtClean="0"/>
               <a:pPr/>
-              <a:t>11/16/2022</a:t>
+              <a:t>11/20/2022</a:t>
             </a:fld>
             <a:endParaRPr lang="en-US" dirty="0"/>
           </a:p>
@@ -3363,7 +3363,7 @@
             <a:fld id="{57E0CF6C-748E-4B7A-BC8B-3011EF78ED13}" type="datetime1">
               <a:rPr lang="en-US" smtClean="0"/>
               <a:pPr/>
-              <a:t>11/16/2022</a:t>
+              <a:t>11/20/2022</a:t>
             </a:fld>
             <a:endParaRPr lang="en-US" dirty="0"/>
           </a:p>
@@ -3552,7 +3552,7 @@
             <a:fld id="{57E0CF6C-748E-4B7A-BC8B-3011EF78ED13}" type="datetime1">
               <a:rPr lang="en-US" smtClean="0"/>
               <a:pPr/>
-              <a:t>11/16/2022</a:t>
+              <a:t>11/20/2022</a:t>
             </a:fld>
             <a:endParaRPr lang="en-US" dirty="0"/>
           </a:p>
@@ -3850,7 +3850,7 @@
             <a:fld id="{57E0CF6C-748E-4B7A-BC8B-3011EF78ED13}" type="datetime1">
               <a:rPr lang="en-US" smtClean="0"/>
               <a:pPr/>
-              <a:t>11/16/2022</a:t>
+              <a:t>11/20/2022</a:t>
             </a:fld>
             <a:endParaRPr lang="en-US" dirty="0"/>
           </a:p>
@@ -4101,7 +4101,7 @@
             <a:fld id="{57E0CF6C-748E-4B7A-BC8B-3011EF78ED13}" type="datetime1">
               <a:rPr lang="en-US" smtClean="0"/>
               <a:pPr/>
-              <a:t>11/16/2022</a:t>
+              <a:t>11/20/2022</a:t>
             </a:fld>
             <a:endParaRPr lang="en-US" dirty="0"/>
           </a:p>
@@ -4489,7 +4489,7 @@
             <a:fld id="{57E0CF6C-748E-4B7A-BC8B-3011EF78ED13}" type="datetime1">
               <a:rPr lang="en-US" smtClean="0"/>
               <a:pPr/>
-              <a:t>11/16/2022</a:t>
+              <a:t>11/20/2022</a:t>
             </a:fld>
             <a:endParaRPr lang="en-US" dirty="0"/>
           </a:p>
@@ -4616,7 +4616,7 @@
             <a:fld id="{57E0CF6C-748E-4B7A-BC8B-3011EF78ED13}" type="datetime1">
               <a:rPr lang="en-US" smtClean="0"/>
               <a:pPr/>
-              <a:t>11/16/2022</a:t>
+              <a:t>11/20/2022</a:t>
             </a:fld>
             <a:endParaRPr lang="en-US" dirty="0"/>
           </a:p>
@@ -4720,7 +4720,7 @@
             <a:fld id="{57E0CF6C-748E-4B7A-BC8B-3011EF78ED13}" type="datetime1">
               <a:rPr lang="en-US" smtClean="0"/>
               <a:pPr/>
-              <a:t>11/16/2022</a:t>
+              <a:t>11/20/2022</a:t>
             </a:fld>
             <a:endParaRPr lang="en-US" dirty="0"/>
           </a:p>
@@ -4978,7 +4978,7 @@
             <a:fld id="{57E0CF6C-748E-4B7A-BC8B-3011EF78ED13}" type="datetime1">
               <a:rPr lang="en-US" smtClean="0"/>
               <a:pPr/>
-              <a:t>11/16/2022</a:t>
+              <a:t>11/20/2022</a:t>
             </a:fld>
             <a:endParaRPr lang="en-US" dirty="0"/>
           </a:p>
@@ -5244,7 +5244,7 @@
             <a:fld id="{57E0CF6C-748E-4B7A-BC8B-3011EF78ED13}" type="datetime1">
               <a:rPr lang="en-US" smtClean="0"/>
               <a:pPr/>
-              <a:t>11/16/2022</a:t>
+              <a:t>11/20/2022</a:t>
             </a:fld>
             <a:endParaRPr lang="en-US" dirty="0"/>
           </a:p>
@@ -5496,7 +5496,7 @@
             <a:fld id="{57E0CF6C-748E-4B7A-BC8B-3011EF78ED13}" type="datetime1">
               <a:rPr lang="en-US" smtClean="0"/>
               <a:pPr/>
-              <a:t>11/16/2022</a:t>
+              <a:t>11/20/2022</a:t>
             </a:fld>
             <a:endParaRPr lang="en-US" dirty="0"/>
           </a:p>
@@ -6462,8 +6462,12 @@
           <a:p>
             <a:pPr algn="ctr"/>
             <a:r>
+              <a:rPr lang="es-ES" sz="4000" b="1" u="sng"/>
+              <a:t>¿Qué </a:t>
+            </a:r>
+            <a:r>
               <a:rPr lang="es-ES" sz="4000" b="1" u="sng" dirty="0"/>
-              <a:t>¿Que es la depresión?</a:t>
+              <a:t>es la depresión?</a:t>
             </a:r>
             <a:endParaRPr lang="es-CL" sz="4000" b="1" u="sng" dirty="0"/>
           </a:p>

--- a/presentaciion FLP.pptx
+++ b/presentaciion FLP.pptx
@@ -13,7 +13,8 @@
     <p:sldId id="259" r:id="rId7"/>
     <p:sldId id="261" r:id="rId8"/>
     <p:sldId id="258" r:id="rId9"/>
-    <p:sldId id="264" r:id="rId10"/>
+    <p:sldId id="267" r:id="rId10"/>
+    <p:sldId id="264" r:id="rId11"/>
   </p:sldIdLst>
   <p:sldSz cx="12192000" cy="6858000"/>
   <p:notesSz cx="6858000" cy="9144000"/>
@@ -291,7 +292,7 @@
             <a:fld id="{57E0CF6C-748E-4B7A-BC8B-3011EF78ED13}" type="datetime1">
               <a:rPr lang="en-US" smtClean="0"/>
               <a:pPr/>
-              <a:t>11/20/2022</a:t>
+              <a:t>11/21/2022</a:t>
             </a:fld>
             <a:endParaRPr lang="en-US" dirty="0"/>
           </a:p>
@@ -567,7 +568,7 @@
             <a:fld id="{57E0CF6C-748E-4B7A-BC8B-3011EF78ED13}" type="datetime1">
               <a:rPr lang="en-US" smtClean="0"/>
               <a:pPr/>
-              <a:t>11/20/2022</a:t>
+              <a:t>11/21/2022</a:t>
             </a:fld>
             <a:endParaRPr lang="en-US" dirty="0"/>
           </a:p>
@@ -807,7 +808,7 @@
             <a:fld id="{57E0CF6C-748E-4B7A-BC8B-3011EF78ED13}" type="datetime1">
               <a:rPr lang="en-US" smtClean="0"/>
               <a:pPr/>
-              <a:t>11/20/2022</a:t>
+              <a:t>11/21/2022</a:t>
             </a:fld>
             <a:endParaRPr lang="en-US" dirty="0"/>
           </a:p>
@@ -1126,7 +1127,7 @@
             <a:fld id="{57E0CF6C-748E-4B7A-BC8B-3011EF78ED13}" type="datetime1">
               <a:rPr lang="en-US" smtClean="0"/>
               <a:pPr/>
-              <a:t>11/20/2022</a:t>
+              <a:t>11/21/2022</a:t>
             </a:fld>
             <a:endParaRPr lang="en-US" dirty="0"/>
           </a:p>
@@ -1608,7 +1609,7 @@
             <a:fld id="{57E0CF6C-748E-4B7A-BC8B-3011EF78ED13}" type="datetime1">
               <a:rPr lang="en-US" smtClean="0"/>
               <a:pPr/>
-              <a:t>11/20/2022</a:t>
+              <a:t>11/21/2022</a:t>
             </a:fld>
             <a:endParaRPr lang="en-US" dirty="0"/>
           </a:p>
@@ -2164,7 +2165,7 @@
             <a:fld id="{57E0CF6C-748E-4B7A-BC8B-3011EF78ED13}" type="datetime1">
               <a:rPr lang="en-US" smtClean="0"/>
               <a:pPr/>
-              <a:t>11/20/2022</a:t>
+              <a:t>11/21/2022</a:t>
             </a:fld>
             <a:endParaRPr lang="en-US" dirty="0"/>
           </a:p>
@@ -2947,7 +2948,7 @@
             <a:fld id="{57E0CF6C-748E-4B7A-BC8B-3011EF78ED13}" type="datetime1">
               <a:rPr lang="en-US" smtClean="0"/>
               <a:pPr/>
-              <a:t>11/20/2022</a:t>
+              <a:t>11/21/2022</a:t>
             </a:fld>
             <a:endParaRPr lang="en-US" dirty="0"/>
           </a:p>
@@ -3131,7 +3132,7 @@
             <a:fld id="{57E0CF6C-748E-4B7A-BC8B-3011EF78ED13}" type="datetime1">
               <a:rPr lang="en-US" smtClean="0"/>
               <a:pPr/>
-              <a:t>11/20/2022</a:t>
+              <a:t>11/21/2022</a:t>
             </a:fld>
             <a:endParaRPr lang="en-US" dirty="0"/>
           </a:p>
@@ -3363,7 +3364,7 @@
             <a:fld id="{57E0CF6C-748E-4B7A-BC8B-3011EF78ED13}" type="datetime1">
               <a:rPr lang="en-US" smtClean="0"/>
               <a:pPr/>
-              <a:t>11/20/2022</a:t>
+              <a:t>11/21/2022</a:t>
             </a:fld>
             <a:endParaRPr lang="en-US" dirty="0"/>
           </a:p>
@@ -3552,7 +3553,7 @@
             <a:fld id="{57E0CF6C-748E-4B7A-BC8B-3011EF78ED13}" type="datetime1">
               <a:rPr lang="en-US" smtClean="0"/>
               <a:pPr/>
-              <a:t>11/20/2022</a:t>
+              <a:t>11/21/2022</a:t>
             </a:fld>
             <a:endParaRPr lang="en-US" dirty="0"/>
           </a:p>
@@ -3850,7 +3851,7 @@
             <a:fld id="{57E0CF6C-748E-4B7A-BC8B-3011EF78ED13}" type="datetime1">
               <a:rPr lang="en-US" smtClean="0"/>
               <a:pPr/>
-              <a:t>11/20/2022</a:t>
+              <a:t>11/21/2022</a:t>
             </a:fld>
             <a:endParaRPr lang="en-US" dirty="0"/>
           </a:p>
@@ -4101,7 +4102,7 @@
             <a:fld id="{57E0CF6C-748E-4B7A-BC8B-3011EF78ED13}" type="datetime1">
               <a:rPr lang="en-US" smtClean="0"/>
               <a:pPr/>
-              <a:t>11/20/2022</a:t>
+              <a:t>11/21/2022</a:t>
             </a:fld>
             <a:endParaRPr lang="en-US" dirty="0"/>
           </a:p>
@@ -4489,7 +4490,7 @@
             <a:fld id="{57E0CF6C-748E-4B7A-BC8B-3011EF78ED13}" type="datetime1">
               <a:rPr lang="en-US" smtClean="0"/>
               <a:pPr/>
-              <a:t>11/20/2022</a:t>
+              <a:t>11/21/2022</a:t>
             </a:fld>
             <a:endParaRPr lang="en-US" dirty="0"/>
           </a:p>
@@ -4616,7 +4617,7 @@
             <a:fld id="{57E0CF6C-748E-4B7A-BC8B-3011EF78ED13}" type="datetime1">
               <a:rPr lang="en-US" smtClean="0"/>
               <a:pPr/>
-              <a:t>11/20/2022</a:t>
+              <a:t>11/21/2022</a:t>
             </a:fld>
             <a:endParaRPr lang="en-US" dirty="0"/>
           </a:p>
@@ -4720,7 +4721,7 @@
             <a:fld id="{57E0CF6C-748E-4B7A-BC8B-3011EF78ED13}" type="datetime1">
               <a:rPr lang="en-US" smtClean="0"/>
               <a:pPr/>
-              <a:t>11/20/2022</a:t>
+              <a:t>11/21/2022</a:t>
             </a:fld>
             <a:endParaRPr lang="en-US" dirty="0"/>
           </a:p>
@@ -4978,7 +4979,7 @@
             <a:fld id="{57E0CF6C-748E-4B7A-BC8B-3011EF78ED13}" type="datetime1">
               <a:rPr lang="en-US" smtClean="0"/>
               <a:pPr/>
-              <a:t>11/20/2022</a:t>
+              <a:t>11/21/2022</a:t>
             </a:fld>
             <a:endParaRPr lang="en-US" dirty="0"/>
           </a:p>
@@ -5244,7 +5245,7 @@
             <a:fld id="{57E0CF6C-748E-4B7A-BC8B-3011EF78ED13}" type="datetime1">
               <a:rPr lang="en-US" smtClean="0"/>
               <a:pPr/>
-              <a:t>11/20/2022</a:t>
+              <a:t>11/21/2022</a:t>
             </a:fld>
             <a:endParaRPr lang="en-US" dirty="0"/>
           </a:p>
@@ -5496,7 +5497,7 @@
             <a:fld id="{57E0CF6C-748E-4B7A-BC8B-3011EF78ED13}" type="datetime1">
               <a:rPr lang="en-US" smtClean="0"/>
               <a:pPr/>
-              <a:t>11/20/2022</a:t>
+              <a:t>11/21/2022</a:t>
             </a:fld>
             <a:endParaRPr lang="en-US" dirty="0"/>
           </a:p>
@@ -6104,6 +6105,188 @@
 </p:sld>
 </file>
 
+<file path=ppt/slides/slide10.xml><?xml version="1.0" encoding="utf-8"?>
+<p:sld xmlns:a="http://schemas.openxmlformats.org/drawingml/2006/main" xmlns:r="http://schemas.openxmlformats.org/officeDocument/2006/relationships" xmlns:p="http://schemas.openxmlformats.org/presentationml/2006/main">
+  <p:cSld>
+    <p:spTree>
+      <p:nvGrpSpPr>
+        <p:cNvPr id="1" name=""/>
+        <p:cNvGrpSpPr/>
+        <p:nvPr/>
+      </p:nvGrpSpPr>
+      <p:grpSpPr>
+        <a:xfrm>
+          <a:off x="0" y="0"/>
+          <a:ext cx="0" cy="0"/>
+          <a:chOff x="0" y="0"/>
+          <a:chExt cx="0" cy="0"/>
+        </a:xfrm>
+      </p:grpSpPr>
+      <p:pic>
+        <p:nvPicPr>
+          <p:cNvPr id="21" name="Picture 3" descr="Fondo con red tecnológica">
+            <a:extLst>
+              <a:ext uri="{FF2B5EF4-FFF2-40B4-BE49-F238E27FC236}">
+                <a16:creationId xmlns:a16="http://schemas.microsoft.com/office/drawing/2014/main" id="{7A148CE5-BE18-0BDE-8FED-07F5C2D31623}"/>
+              </a:ext>
+            </a:extLst>
+          </p:cNvPr>
+          <p:cNvPicPr>
+            <a:picLocks noChangeAspect="1"/>
+          </p:cNvPicPr>
+          <p:nvPr/>
+        </p:nvPicPr>
+        <p:blipFill rotWithShape="1">
+          <a:blip r:embed="rId2">
+            <a:alphaModFix amt="60000"/>
+          </a:blip>
+          <a:srcRect b="3453"/>
+          <a:stretch/>
+        </p:blipFill>
+        <p:spPr>
+          <a:xfrm>
+            <a:off x="20" y="10"/>
+            <a:ext cx="12191980" cy="6856614"/>
+          </a:xfrm>
+          <a:prstGeom prst="rect">
+            <a:avLst/>
+          </a:prstGeom>
+        </p:spPr>
+      </p:pic>
+      <p:sp>
+        <p:nvSpPr>
+          <p:cNvPr id="4" name="CuadroTexto 3">
+            <a:extLst>
+              <a:ext uri="{FF2B5EF4-FFF2-40B4-BE49-F238E27FC236}">
+                <a16:creationId xmlns:a16="http://schemas.microsoft.com/office/drawing/2014/main" id="{486D47C4-61DF-F324-01B0-42E7E2C1A64E}"/>
+              </a:ext>
+            </a:extLst>
+          </p:cNvPr>
+          <p:cNvSpPr txBox="1"/>
+          <p:nvPr/>
+        </p:nvSpPr>
+        <p:spPr>
+          <a:xfrm>
+            <a:off x="3151573" y="443883"/>
+            <a:ext cx="5601810" cy="830997"/>
+          </a:xfrm>
+          <a:prstGeom prst="rect">
+            <a:avLst/>
+          </a:prstGeom>
+          <a:noFill/>
+        </p:spPr>
+        <p:txBody>
+          <a:bodyPr wrap="square" rtlCol="0">
+            <a:spAutoFit/>
+          </a:bodyPr>
+          <a:lstStyle/>
+          <a:p>
+            <a:pPr algn="ctr"/>
+            <a:r>
+              <a:rPr lang="es-ES" sz="4800" b="1" u="sng" dirty="0"/>
+              <a:t>Conclusión</a:t>
+            </a:r>
+            <a:endParaRPr lang="es-CL" sz="4800" b="1" u="sng" dirty="0"/>
+          </a:p>
+        </p:txBody>
+      </p:sp>
+      <p:pic>
+        <p:nvPicPr>
+          <p:cNvPr id="3" name="Imagen 2" descr="Imagen de la pantalla de un celular con la foto de una persona&#10;&#10;Descripción generada automáticamente con confianza baja">
+            <a:extLst>
+              <a:ext uri="{FF2B5EF4-FFF2-40B4-BE49-F238E27FC236}">
+                <a16:creationId xmlns:a16="http://schemas.microsoft.com/office/drawing/2014/main" id="{F006A959-75AA-9A3B-AB6E-9F0F27DAB7FD}"/>
+              </a:ext>
+            </a:extLst>
+          </p:cNvPr>
+          <p:cNvPicPr>
+            <a:picLocks noChangeAspect="1"/>
+          </p:cNvPicPr>
+          <p:nvPr/>
+        </p:nvPicPr>
+        <p:blipFill>
+          <a:blip r:embed="rId3">
+            <a:extLst>
+              <a:ext uri="{28A0092B-C50C-407E-A947-70E740481C1C}">
+                <a14:useLocalDpi xmlns:a14="http://schemas.microsoft.com/office/drawing/2010/main" val="0"/>
+              </a:ext>
+            </a:extLst>
+          </a:blip>
+          <a:stretch>
+            <a:fillRect/>
+          </a:stretch>
+        </p:blipFill>
+        <p:spPr>
+          <a:xfrm>
+            <a:off x="132244" y="3033712"/>
+            <a:ext cx="6038657" cy="2595563"/>
+          </a:xfrm>
+          <a:prstGeom prst="rect">
+            <a:avLst/>
+          </a:prstGeom>
+          <a:ln>
+            <a:noFill/>
+          </a:ln>
+          <a:effectLst>
+            <a:softEdge rad="112500"/>
+          </a:effectLst>
+        </p:spPr>
+      </p:pic>
+      <p:pic>
+        <p:nvPicPr>
+          <p:cNvPr id="6" name="Imagen 5" descr="Texto&#10;&#10;Descripción generada automáticamente">
+            <a:extLst>
+              <a:ext uri="{FF2B5EF4-FFF2-40B4-BE49-F238E27FC236}">
+                <a16:creationId xmlns:a16="http://schemas.microsoft.com/office/drawing/2014/main" id="{9FD257F0-B7C7-728E-1B58-B6DAC4BC930C}"/>
+              </a:ext>
+            </a:extLst>
+          </p:cNvPr>
+          <p:cNvPicPr>
+            <a:picLocks noChangeAspect="1"/>
+          </p:cNvPicPr>
+          <p:nvPr/>
+        </p:nvPicPr>
+        <p:blipFill>
+          <a:blip r:embed="rId4">
+            <a:extLst>
+              <a:ext uri="{28A0092B-C50C-407E-A947-70E740481C1C}">
+                <a14:useLocalDpi xmlns:a14="http://schemas.microsoft.com/office/drawing/2010/main" val="0"/>
+              </a:ext>
+            </a:extLst>
+          </a:blip>
+          <a:stretch>
+            <a:fillRect/>
+          </a:stretch>
+        </p:blipFill>
+        <p:spPr>
+          <a:xfrm>
+            <a:off x="7843837" y="2509837"/>
+            <a:ext cx="3465210" cy="2595563"/>
+          </a:xfrm>
+          <a:prstGeom prst="rect">
+            <a:avLst/>
+          </a:prstGeom>
+          <a:ln>
+            <a:noFill/>
+          </a:ln>
+          <a:effectLst>
+            <a:softEdge rad="112500"/>
+          </a:effectLst>
+        </p:spPr>
+      </p:pic>
+    </p:spTree>
+    <p:extLst>
+      <p:ext uri="{BB962C8B-B14F-4D97-AF65-F5344CB8AC3E}">
+        <p14:creationId xmlns:p14="http://schemas.microsoft.com/office/powerpoint/2010/main" val="3743533636"/>
+      </p:ext>
+    </p:extLst>
+  </p:cSld>
+  <p:clrMapOvr>
+    <a:masterClrMapping/>
+  </p:clrMapOvr>
+</p:sld>
+</file>
+
 <file path=ppt/slides/slide2.xml><?xml version="1.0" encoding="utf-8"?>
 <p:sld xmlns:a="http://schemas.openxmlformats.org/drawingml/2006/main" xmlns:r="http://schemas.openxmlformats.org/officeDocument/2006/relationships" xmlns:p="http://schemas.openxmlformats.org/presentationml/2006/main">
   <p:cSld>
@@ -7374,7 +7557,7 @@
         </p:blipFill>
         <p:spPr>
           <a:xfrm>
-            <a:off x="20" y="10"/>
+            <a:off x="0" y="0"/>
             <a:ext cx="12191980" cy="6856614"/>
           </a:xfrm>
           <a:prstGeom prst="rect">
@@ -7387,7 +7570,7 @@
           <p:cNvPr id="4" name="CuadroTexto 3">
             <a:extLst>
               <a:ext uri="{FF2B5EF4-FFF2-40B4-BE49-F238E27FC236}">
-                <a16:creationId xmlns:a16="http://schemas.microsoft.com/office/drawing/2014/main" id="{486D47C4-61DF-F324-01B0-42E7E2C1A64E}"/>
+                <a16:creationId xmlns:a16="http://schemas.microsoft.com/office/drawing/2014/main" id="{0E6CA376-F817-91A4-96DA-34A406CE8D9A}"/>
               </a:ext>
             </a:extLst>
           </p:cNvPr>
@@ -7396,8 +7579,8 @@
         </p:nvSpPr>
         <p:spPr>
           <a:xfrm>
-            <a:off x="3151573" y="443883"/>
-            <a:ext cx="5601810" cy="830997"/>
+            <a:off x="2478339" y="568170"/>
+            <a:ext cx="7235301" cy="769441"/>
           </a:xfrm>
           <a:prstGeom prst="rect">
             <a:avLst/>
@@ -7412,19 +7595,19 @@
           <a:p>
             <a:pPr algn="ctr"/>
             <a:r>
-              <a:rPr lang="es-ES" sz="4800" b="1" u="sng" dirty="0"/>
-              <a:t>Conclusión</a:t>
-            </a:r>
-            <a:endParaRPr lang="es-CL" sz="4800" b="1" u="sng" dirty="0"/>
+              <a:rPr lang="es-ES" sz="4400" b="1" u="sng" dirty="0"/>
+              <a:t>Sistema</a:t>
+            </a:r>
+            <a:endParaRPr lang="es-CL" sz="4400" b="1" u="sng" dirty="0"/>
           </a:p>
         </p:txBody>
       </p:sp>
       <p:pic>
         <p:nvPicPr>
-          <p:cNvPr id="3" name="Imagen 2" descr="Imagen de la pantalla de un celular con la foto de una persona&#10;&#10;Descripción generada automáticamente con confianza baja">
+          <p:cNvPr id="7" name="Imagen 6" descr="Un reloj con números romanos&#10;&#10;Descripción generada automáticamente con confianza media">
             <a:extLst>
               <a:ext uri="{FF2B5EF4-FFF2-40B4-BE49-F238E27FC236}">
-                <a16:creationId xmlns:a16="http://schemas.microsoft.com/office/drawing/2014/main" id="{F006A959-75AA-9A3B-AB6E-9F0F27DAB7FD}"/>
+                <a16:creationId xmlns:a16="http://schemas.microsoft.com/office/drawing/2014/main" id="{4FB2AB4D-6CF0-6672-7A9C-4F3AFDEB4BCD}"/>
               </a:ext>
             </a:extLst>
           </p:cNvPr>
@@ -7447,8 +7630,8 @@
         </p:blipFill>
         <p:spPr>
           <a:xfrm>
-            <a:off x="132244" y="3033712"/>
-            <a:ext cx="6038657" cy="2595563"/>
+            <a:off x="435047" y="2142491"/>
+            <a:ext cx="4994204" cy="3333631"/>
           </a:xfrm>
           <a:prstGeom prst="rect">
             <a:avLst/>
@@ -7463,10 +7646,10 @@
       </p:pic>
       <p:pic>
         <p:nvPicPr>
-          <p:cNvPr id="6" name="Imagen 5" descr="Texto&#10;&#10;Descripción generada automáticamente">
+          <p:cNvPr id="9" name="Imagen 8" descr="Imagen que contiene dibujo&#10;&#10;Descripción generada automáticamente">
             <a:extLst>
               <a:ext uri="{FF2B5EF4-FFF2-40B4-BE49-F238E27FC236}">
-                <a16:creationId xmlns:a16="http://schemas.microsoft.com/office/drawing/2014/main" id="{9FD257F0-B7C7-728E-1B58-B6DAC4BC930C}"/>
+                <a16:creationId xmlns:a16="http://schemas.microsoft.com/office/drawing/2014/main" id="{1855E837-EE14-1C57-91AD-50283EA456C6}"/>
               </a:ext>
             </a:extLst>
           </p:cNvPr>
@@ -7489,8 +7672,8 @@
         </p:blipFill>
         <p:spPr>
           <a:xfrm>
-            <a:off x="7843837" y="2509837"/>
-            <a:ext cx="3465210" cy="2595563"/>
+            <a:off x="5864298" y="3239044"/>
+            <a:ext cx="5838825" cy="3050786"/>
           </a:xfrm>
           <a:prstGeom prst="rect">
             <a:avLst/>
@@ -7506,7 +7689,7 @@
     </p:spTree>
     <p:extLst>
       <p:ext uri="{BB962C8B-B14F-4D97-AF65-F5344CB8AC3E}">
-        <p14:creationId xmlns:p14="http://schemas.microsoft.com/office/powerpoint/2010/main" val="3743533636"/>
+        <p14:creationId xmlns:p14="http://schemas.microsoft.com/office/powerpoint/2010/main" val="3286441897"/>
       </p:ext>
     </p:extLst>
   </p:cSld>
